--- a/ders/serbest-cizim-teknikleri/02-1hafta-sunum.pptx
+++ b/ders/serbest-cizim-teknikleri/02-1hafta-sunum.pptx
@@ -3905,7 +3905,7 @@
                 <a:ea typeface="Courier New" pitchFamily="34" charset="-122"/>
                 <a:cs typeface="Courier New" pitchFamily="34" charset="-120"/>
               </a:rPr>
-              <a:t>14 hafta  ·  4 modül  ·  11 atölye  ·  sınav yok</a:t>
+              <a:t>14 hafta  ·  4 modül  ·  12 atölye  ·  sınav yok</a:t>
             </a:r>
             <a:endParaRPr lang="en-US" sz="1200" dirty="0"/>
           </a:p>
@@ -4422,7 +4422,7 @@
                 <a:ea typeface="Courier New" pitchFamily="34" charset="-122"/>
                 <a:cs typeface="Courier New" pitchFamily="34" charset="-120"/>
               </a:rPr>
-              <a:t>Hafta 4’te bunu beş yöntemle deneyeceğiz:</a:t>
+              <a:t>Hafta 4’te birlikte dışarı çıkacağız:</a:t>
             </a:r>
             <a:endParaRPr lang="en-US" sz="1300" dirty="0"/>
           </a:p>
@@ -4442,7 +4442,7 @@
                 <a:ea typeface="Courier New" pitchFamily="34" charset="-122"/>
                 <a:cs typeface="Courier New" pitchFamily="34" charset="-120"/>
               </a:rPr>
-              <a:t>kör kontur · modifiye kontur · jest · negatif alan · sentez</a:t>
+              <a:t>önce sadece bakacağız, sonra hafızadan, sonra gözlemle çizeceğiz.</a:t>
             </a:r>
             <a:endParaRPr lang="en-US" sz="1300" dirty="0"/>
           </a:p>
@@ -5427,7 +5427,7 @@
                 <a:ea typeface="Calibri" pitchFamily="34" charset="-122"/>
                 <a:cs typeface="Calibri" pitchFamily="34" charset="-120"/>
               </a:rPr>
-              <a:t>oran ve perspektif</a:t>
+              <a:t>oran ve göz hizası</a:t>
             </a:r>
             <a:endParaRPr lang="en-US" sz="1500" dirty="0"/>
           </a:p>
@@ -5466,7 +5466,7 @@
                 <a:ea typeface="Courier New" pitchFamily="34" charset="-122"/>
                 <a:cs typeface="Courier New" pitchFamily="34" charset="-120"/>
               </a:rPr>
-              <a:t>Hafta 5, 8, 9</a:t>
+              <a:t>Hafta 5, 8</a:t>
             </a:r>
             <a:endParaRPr lang="en-US" sz="1200" dirty="0"/>
           </a:p>
@@ -5608,7 +5608,7 @@
                 <a:ea typeface="Calibri" pitchFamily="34" charset="-122"/>
                 <a:cs typeface="Calibri" pitchFamily="34" charset="-120"/>
               </a:rPr>
-              <a:t>ton ve değer</a:t>
+              <a:t>tarama ve ton</a:t>
             </a:r>
             <a:endParaRPr lang="en-US" sz="1500" dirty="0"/>
           </a:p>
@@ -5647,7 +5647,7 @@
                 <a:ea typeface="Courier New" pitchFamily="34" charset="-122"/>
                 <a:cs typeface="Courier New" pitchFamily="34" charset="-120"/>
               </a:rPr>
-              <a:t>Hafta 10, 11</a:t>
+              <a:t>Hafta 9, 10</a:t>
             </a:r>
             <a:endParaRPr lang="en-US" sz="1200" dirty="0"/>
           </a:p>
@@ -5789,7 +5789,7 @@
                 <a:ea typeface="Calibri" pitchFamily="34" charset="-122"/>
                 <a:cs typeface="Calibri" pitchFamily="34" charset="-120"/>
               </a:rPr>
-              <a:t>kompozisyon ve sentez</a:t>
+              <a:t>kompozisyon ve katman</a:t>
             </a:r>
             <a:endParaRPr lang="en-US" sz="1500" dirty="0"/>
           </a:p>
@@ -5828,7 +5828,7 @@
                 <a:ea typeface="Courier New" pitchFamily="34" charset="-122"/>
                 <a:cs typeface="Courier New" pitchFamily="34" charset="-120"/>
               </a:rPr>
-              <a:t>Hafta 13, 14</a:t>
+              <a:t>Hafta 12–14</a:t>
             </a:r>
             <a:endParaRPr lang="en-US" sz="1200" dirty="0"/>
           </a:p>
@@ -11225,7 +11225,7 @@
                 <a:ea typeface="Calibri" pitchFamily="34" charset="-122"/>
                 <a:cs typeface="Calibri" pitchFamily="34" charset="-120"/>
               </a:rPr>
-              <a:t>Her modül bir öncekinin becerisini yeni bir bağlamda geri getirir. Çizgi 2. haftada ifade, 10. haftada ton, 11. haftada dokudur.</a:t>
+              <a:t>Her modül bir öncekinin becerisini yeni bir bağlamda geri getirir. Çizgi 2. haftada ifade, 9. haftada ton, 13. haftada katman kenarıdır.</a:t>
             </a:r>
             <a:endParaRPr lang="en-US" sz="1500" dirty="0"/>
           </a:p>
@@ -11774,7 +11774,7 @@
                 <a:ea typeface="Calibri" pitchFamily="34" charset="-122"/>
                 <a:cs typeface="Calibri" pitchFamily="34" charset="-120"/>
               </a:rPr>
-              <a:t>Mekânın Temsili</a:t>
+              <a:t>Hacim, Ton ve Işık</a:t>
             </a:r>
             <a:endParaRPr lang="en-US" sz="1800" dirty="0"/>
           </a:p>
@@ -12598,7 +12598,7 @@
                 <a:ea typeface="Calibri" pitchFamily="34" charset="-122"/>
                 <a:cs typeface="Calibri" pitchFamily="34" charset="-120"/>
               </a:rPr>
-              <a:t>Kontur, jest, negatif alan</a:t>
+              <a:t>Bakmak ve çizmek · görme yürüyüşü</a:t>
             </a:r>
             <a:endParaRPr lang="en-US" sz="1500" dirty="0"/>
           </a:p>
@@ -13002,7 +13002,7 @@
                 <a:ea typeface="Calibri" pitchFamily="34" charset="-122"/>
                 <a:cs typeface="Calibri" pitchFamily="34" charset="-120"/>
               </a:rPr>
-              <a:t>Perspektif I: tek kaçış noktası</a:t>
+              <a:t>Hacimlerin perspektifi: göz hizası</a:t>
             </a:r>
             <a:endParaRPr lang="en-US" sz="1500" dirty="0"/>
           </a:p>
@@ -13103,7 +13103,7 @@
                 <a:ea typeface="Calibri" pitchFamily="34" charset="-122"/>
                 <a:cs typeface="Calibri" pitchFamily="34" charset="-120"/>
               </a:rPr>
-              <a:t>Perspektif II: mobilya ve ölçek</a:t>
+              <a:t>Tarama: çizgiyle ton üretmek</a:t>
             </a:r>
             <a:endParaRPr lang="en-US" sz="1500" dirty="0"/>
           </a:p>
@@ -13204,7 +13204,7 @@
                 <a:ea typeface="Calibri" pitchFamily="34" charset="-122"/>
                 <a:cs typeface="Calibri" pitchFamily="34" charset="-120"/>
               </a:rPr>
-              <a:t>Işık, değer, atmosferik perspektif</a:t>
+              <a:t>Işık ve gölge</a:t>
             </a:r>
             <a:endParaRPr lang="en-US" sz="1500" dirty="0"/>
           </a:p>
@@ -13305,7 +13305,7 @@
                 <a:ea typeface="Calibri" pitchFamily="34" charset="-122"/>
                 <a:cs typeface="Calibri" pitchFamily="34" charset="-120"/>
               </a:rPr>
-              <a:t>Malzeme ve doku · VİZE 2 teslimi</a:t>
+              <a:t>Yerinde çizim · VİZE 2 teslimi</a:t>
             </a:r>
             <a:endParaRPr lang="en-US" sz="1500" dirty="0"/>
           </a:p>
@@ -13406,7 +13406,7 @@
                 <a:ea typeface="Calibri" pitchFamily="34" charset="-122"/>
                 <a:cs typeface="Calibri" pitchFamily="34" charset="-120"/>
               </a:rPr>
-              <a:t>Etüd haftası: yerinde çizim</a:t>
+              <a:t>Obje günü: gördüğünüz açıdan</a:t>
             </a:r>
             <a:endParaRPr lang="en-US" sz="1500" dirty="0"/>
           </a:p>
@@ -14112,7 +14112,7 @@
                 <a:ea typeface="Calibri" pitchFamily="34" charset="-122"/>
                 <a:cs typeface="Calibri" pitchFamily="34" charset="-120"/>
               </a:rPr>
-              <a:t>Mekân Dosyası</a:t>
+              <a:t>Hacim ve Işık Dosyası</a:t>
             </a:r>
             <a:endParaRPr lang="en-US" sz="1600" dirty="0"/>
           </a:p>
@@ -14541,7 +14541,7 @@
         <p:spPr>
           <a:xfrm>
             <a:off x="777240" y="1828800"/>
-            <a:ext cx="5760720" cy="2468880"/>
+            <a:ext cx="5760720" cy="2423160"/>
           </a:xfrm>
           <a:prstGeom prst="rect">
             <a:avLst/>
@@ -14555,12 +14555,12 @@
           <a:p>
             <a:pPr indent="0" marL="0">
               <a:lnSpc>
-                <a:spcPts val="2400"/>
+                <a:spcPts val="2300"/>
               </a:lnSpc>
               <a:buNone/>
             </a:pPr>
             <a:r>
-              <a:rPr lang="en-US" sz="1600" dirty="0">
+              <a:rPr lang="en-US" sz="1550" dirty="0">
                 <a:solidFill>
                   <a:srgbClr val="1B1F24"/>
                 </a:solidFill>
@@ -14572,12 +14572,12 @@
             </a:r>
             <a:pPr indent="0" marL="0">
               <a:lnSpc>
-                <a:spcPts val="2400"/>
+                <a:spcPts val="2300"/>
               </a:lnSpc>
               <a:buNone/>
             </a:pPr>
             <a:r>
-              <a:rPr lang="en-US" sz="1600" b="1" dirty="0">
+              <a:rPr lang="en-US" sz="1550" b="1" dirty="0">
                 <a:solidFill>
                   <a:srgbClr val="1B1F24"/>
                 </a:solidFill>
@@ -14589,12 +14589,12 @@
             </a:r>
             <a:pPr indent="0" marL="0">
               <a:lnSpc>
-                <a:spcPts val="2400"/>
+                <a:spcPts val="2300"/>
               </a:lnSpc>
               <a:buNone/>
             </a:pPr>
             <a:r>
-              <a:rPr lang="en-US" sz="1600" dirty="0">
+              <a:rPr lang="en-US" sz="1550" dirty="0">
                 <a:solidFill>
                   <a:srgbClr val="1B1F24"/>
                 </a:solidFill>
@@ -14602,14 +14602,14 @@
                 <a:ea typeface="Calibri" pitchFamily="34" charset="-122"/>
                 <a:cs typeface="Calibri" pitchFamily="34" charset="-120"/>
               </a:rPr>
-              <a:t>, aralarında boşluk, önde bir çerçeve. Konu: 12. haftada sahada kendi çizdiğiniz gerçek bir iç mekân.</a:t>
-            </a:r>
-            <a:endParaRPr lang="en-US" sz="1600" dirty="0"/>
+              <a:t>, önde bir çerçeve. Ön katman 12. haftanın nesnesi, orta katmanlar 11. haftanın mekânı, arka katman dışarısı.</a:t>
+            </a:r>
+            <a:endParaRPr lang="en-US" sz="1550" dirty="0"/>
           </a:p>
           <a:p>
             <a:pPr indent="0" marL="0">
               <a:lnSpc>
-                <a:spcPts val="2400"/>
+                <a:spcPts val="2300"/>
               </a:lnSpc>
               <a:buNone/>
             </a:pPr>
@@ -14625,17 +14625,17 @@
               <a:t>
 </a:t>
             </a:r>
-            <a:endParaRPr lang="en-US" sz="1600" dirty="0"/>
+            <a:endParaRPr lang="en-US" sz="1550" dirty="0"/>
           </a:p>
           <a:p>
             <a:pPr indent="0" marL="0">
               <a:lnSpc>
-                <a:spcPts val="2400"/>
+                <a:spcPts val="2300"/>
               </a:lnSpc>
               <a:buNone/>
             </a:pPr>
             <a:r>
-              <a:rPr lang="en-US" sz="1600" dirty="0">
+              <a:rPr lang="en-US" sz="1550" dirty="0">
                 <a:solidFill>
                   <a:srgbClr val="1B1F24"/>
                 </a:solidFill>
@@ -14647,12 +14647,12 @@
             </a:r>
             <a:pPr indent="0" marL="0">
               <a:lnSpc>
-                <a:spcPts val="2400"/>
+                <a:spcPts val="2300"/>
               </a:lnSpc>
               <a:buNone/>
             </a:pPr>
             <a:r>
-              <a:rPr lang="en-US" sz="1600" b="1" dirty="0">
+              <a:rPr lang="en-US" sz="1550" b="1" dirty="0">
                 <a:solidFill>
                   <a:srgbClr val="1B1F24"/>
                 </a:solidFill>
@@ -14662,7 +14662,7 @@
               </a:rPr>
               <a:t>her katman önce elle çizilir; kesim çizimin türevidir.</a:t>
             </a:r>
-            <a:endParaRPr lang="en-US" sz="1600" dirty="0"/>
+            <a:endParaRPr lang="en-US" sz="1550" dirty="0"/>
           </a:p>
         </p:txBody>
       </p:sp>
@@ -19377,7 +19377,7 @@
         <p:spPr>
           <a:xfrm>
             <a:off x="6949440" y="1783080"/>
-            <a:ext cx="4462272" cy="3931920"/>
+            <a:ext cx="4462272" cy="4069080"/>
           </a:xfrm>
           <a:prstGeom prst="rect">
             <a:avLst/>
@@ -19441,7 +19441,7 @@
         <p:spPr>
           <a:xfrm>
             <a:off x="7315200" y="2651760"/>
-            <a:ext cx="3749040" cy="2697480"/>
+            <a:ext cx="3749040" cy="2971800"/>
           </a:xfrm>
           <a:prstGeom prst="rect">
             <a:avLst/>
@@ -19455,12 +19455,12 @@
           <a:p>
             <a:pPr indent="0" marL="0">
               <a:lnSpc>
-                <a:spcPts val="2100"/>
+                <a:spcPts val="2000"/>
               </a:lnSpc>
               <a:buNone/>
             </a:pPr>
             <a:r>
-              <a:rPr lang="en-US" sz="1450" dirty="0">
+              <a:rPr lang="en-US" sz="1400" dirty="0">
                 <a:solidFill>
                   <a:srgbClr val="1B1F24"/>
                 </a:solidFill>
@@ -19470,12 +19470,12 @@
               </a:rPr>
               <a:t>Son haftada aynı görevi birebir tekrar yapacaksınız. Sonra bu çizimi size geri vereceğim.</a:t>
             </a:r>
-            <a:endParaRPr lang="en-US" sz="1450" dirty="0"/>
+            <a:endParaRPr lang="en-US" sz="1400" dirty="0"/>
           </a:p>
           <a:p>
             <a:pPr indent="0" marL="0">
               <a:lnSpc>
-                <a:spcPts val="2100"/>
+                <a:spcPts val="2000"/>
               </a:lnSpc>
               <a:buNone/>
             </a:pPr>
@@ -19491,17 +19491,17 @@
               <a:t>
 </a:t>
             </a:r>
-            <a:endParaRPr lang="en-US" sz="1450" dirty="0"/>
+            <a:endParaRPr lang="en-US" sz="1400" dirty="0"/>
           </a:p>
           <a:p>
             <a:pPr indent="0" marL="0">
               <a:lnSpc>
-                <a:spcPts val="2100"/>
+                <a:spcPts val="2000"/>
               </a:lnSpc>
               <a:buNone/>
             </a:pPr>
             <a:r>
-              <a:rPr lang="en-US" sz="1450" dirty="0">
+              <a:rPr lang="en-US" sz="1400" dirty="0">
                 <a:solidFill>
                   <a:srgbClr val="1B1F24"/>
                 </a:solidFill>
@@ -19511,12 +19511,12 @@
               </a:rPr>
               <a:t>İkisini yan yana koyup final dosyanızın ilk sayfası yapacaksınız.</a:t>
             </a:r>
-            <a:endParaRPr lang="en-US" sz="1450" dirty="0"/>
+            <a:endParaRPr lang="en-US" sz="1400" dirty="0"/>
           </a:p>
           <a:p>
             <a:pPr indent="0" marL="0">
               <a:lnSpc>
-                <a:spcPts val="2100"/>
+                <a:spcPts val="2000"/>
               </a:lnSpc>
               <a:buNone/>
             </a:pPr>
@@ -19532,17 +19532,17 @@
               <a:t>
 </a:t>
             </a:r>
-            <a:endParaRPr lang="en-US" sz="1450" dirty="0"/>
+            <a:endParaRPr lang="en-US" sz="1400" dirty="0"/>
           </a:p>
           <a:p>
             <a:pPr indent="0" marL="0">
               <a:lnSpc>
-                <a:spcPts val="2100"/>
+                <a:spcPts val="2000"/>
               </a:lnSpc>
               <a:buNone/>
             </a:pPr>
             <a:r>
-              <a:rPr lang="en-US" sz="1450" dirty="0">
+              <a:rPr lang="en-US" sz="1400" dirty="0">
                 <a:solidFill>
                   <a:srgbClr val="1B1F24"/>
                 </a:solidFill>
@@ -19554,12 +19554,12 @@
             </a:r>
             <a:pPr indent="0" marL="0">
               <a:lnSpc>
-                <a:spcPts val="2100"/>
+                <a:spcPts val="2000"/>
               </a:lnSpc>
               <a:buNone/>
             </a:pPr>
             <a:r>
-              <a:rPr lang="en-US" sz="1450" b="1" dirty="0">
+              <a:rPr lang="en-US" sz="1400" b="1" dirty="0">
                 <a:solidFill>
                   <a:srgbClr val="1B1F24"/>
                 </a:solidFill>
@@ -19569,7 +19569,7 @@
               </a:rPr>
               <a:t>işimize yarayan şey o.</a:t>
             </a:r>
-            <a:endParaRPr lang="en-US" sz="1450" dirty="0"/>
+            <a:endParaRPr lang="en-US" sz="1400" dirty="0"/>
           </a:p>
         </p:txBody>
       </p:sp>
